--- a/docs/Phase 1 PPT.pptx
+++ b/docs/Phase 1 PPT.pptx
@@ -1131,7 +1131,43 @@
           <a:p>
             <a:r>
               <a:rPr lang="en-US" dirty="0"/>
-              <a:t>Four reasons: urgency, agent performance, retention and public reputation, and system problems. Mention that tone also depends on context (sarcasm), so human judgment is needed.</a:t>
+              <a:t>Companies get thousands of support messages a day. Tone tells us how the customer is reacting to the help they get.</a:t>
+            </a:r>
+          </a:p>
+          <a:p>
+            <a:r>
+              <a:rPr lang="en-US" dirty="0"/>
+              <a:t>Spot customers who need attention: frustrated or escalating customers can be flagged so a person looks at them sooner. Tone is one signal, next to what the customer actually needs.</a:t>
+            </a:r>
+          </a:p>
+          <a:p>
+            <a:r>
+              <a:rPr lang="en-US" dirty="0"/>
+              <a:t>Help write better replies: an upset customer should not get a cheerful script. Tone helps pick the right words, or decide to bring in a human.</a:t>
+            </a:r>
+          </a:p>
+          <a:p>
+            <a:r>
+              <a:rPr lang="en-US" dirty="0"/>
+              <a:t>Find repeated problems: if many people are upset about refunds in the same week, that points to something worth looking into.</a:t>
+            </a:r>
+          </a:p>
+          <a:p>
+            <a:r>
+              <a:rPr lang="en-US" dirty="0"/>
+              <a:t>New labels for a hard problem: the 2.8 million tweets have no tone labels. Our annotators, you, create them.</a:t>
+            </a:r>
+          </a:p>
+          <a:p>
+            <a:r>
+              <a:rPr lang="en-US" dirty="0"/>
+              <a:t>And it is not easy: “Thanks a lot” after a useless reply is sarcasm, not praise. That is why you read the whole conversation.</a:t>
+            </a:r>
+          </a:p>
+          <a:p>
+            <a:r>
+              <a:rPr lang="en-US" dirty="0"/>
+              <a:t>Takeaway: reading tone correctly helps a company respond to the right customer, in the right way.</a:t>
             </a:r>
           </a:p>
         </p:txBody>
@@ -1218,7 +1254,7 @@
           <a:p>
             <a:r>
               <a:rPr lang="en-US" dirty="0"/>
-              <a:t>Five labels from calm and positive to angry and demanding. The label is the customer's tone at the end of the conversation. Next five slides: one real example per label.</a:t>
+              <a:t>Five labels from calm and positive to angry and demanding. The label is the customer's overall tone across the whole conversation; the last message does not take priority. If tones mix, use the order shown on the slide. Next five slides: one real example per label.</a:t>
             </a:r>
           </a:p>
         </p:txBody>
@@ -1305,7 +1341,7 @@
           <a:p>
             <a:r>
               <a:rPr lang="en-US" dirty="0"/>
-              <a:t>Click once to show the whole conversation, then once more to show the guide panel. 1. Appreciative or positive: The customer asks for nothing and volunteers enthusiasm, then closes with "Awesome thanks". Everything points to satisfaction.</a:t>
+              <a:t>Click once to show the whole conversation, then once more to show the guide panel. 1. Appreciative or positive: The customer expresses enthusiasm in both messages, praising the movie and saying “Awesome thanks”. They ask for nothing, so the exchange supports an Appreciative label.</a:t>
             </a:r>
           </a:p>
         </p:txBody>
@@ -3301,7 +3337,7 @@
                 <a:ea typeface="Calibri" pitchFamily="34" charset="-122"/>
                 <a:cs typeface="Calibri" pitchFamily="34" charset="-120"/>
               </a:rPr>
-              <a:t>Label the tone the customer ends on.</a:t>
+              <a:t>Label the customer's tone across the whole conversation.</a:t>
             </a:r>
             <a:endParaRPr lang="en-US" sz="1500" dirty="0"/>
           </a:p>
@@ -3599,7 +3635,7 @@
                 <a:ea typeface="Calibri" pitchFamily="34" charset="-122"/>
                 <a:cs typeface="Calibri" pitchFamily="34" charset="-120"/>
               </a:rPr>
-              <a:t>Potato runs locally. 6 annotators, 2 batches of 100 conversations each.</a:t>
+              <a:t>6 annotators use Potato locally. Each receives 100 required items and a second, optional batch of 100.</a:t>
             </a:r>
             <a:endParaRPr lang="en-US" sz="1500" dirty="0"/>
           </a:p>
@@ -3736,7 +3772,7 @@
                           <a:ea typeface="Calibri" pitchFamily="34" charset="-122"/>
                           <a:cs typeface="Calibri" pitchFamily="34" charset="-120"/>
                         </a:rPr>
-                        <a:t>Per batch</a:t>
+                        <a:t>Items each</a:t>
                       </a:r>
                       <a:endParaRPr lang="en-US" sz="1400" dirty="0">
                         <a:latin typeface="Calibri" charset="0"/>
@@ -4742,7 +4778,8 @@
                 <a:ea typeface="Calibri" pitchFamily="34" charset="-122"/>
                 <a:cs typeface="Calibri" pitchFamily="34" charset="-120"/>
               </a:rPr>
-              <a:t>Shared sets give agreement and majority-vote labels. Unique items give coverage: about 450 different conversations per batch round.</a:t>
+              <a:t>Per annotator, per batch: 20 + 10 + 5 + 65 = 100 items.
+Distinct conversations: 20 + 30 + 10 + 390 = 450 per round. Up to 900 across both rounds.</a:t>
             </a:r>
             <a:endParaRPr lang="en-US" sz="1500" dirty="0"/>
           </a:p>
@@ -5199,7 +5236,7 @@
       </p:sp>
       <p:pic>
         <p:nvPicPr>
-          <p:cNvPr id="5" name="Image 0" descr="Spot urgency early"/>
+          <p:cNvPr id="5" name="Image 0" descr="Spot customers who need attention"/>
           <p:cNvPicPr>
             <a:picLocks noChangeAspect="1"/>
           </p:cNvPicPr>
@@ -5254,7 +5291,7 @@
                 <a:ea typeface="Cambria" pitchFamily="34" charset="-122"/>
                 <a:cs typeface="Cambria" pitchFamily="34" charset="-120"/>
               </a:rPr>
-              <a:t>Spot urgency early</a:t>
+              <a:t>Spot customers who need attention</a:t>
             </a:r>
             <a:endParaRPr lang="en-US" sz="2000" dirty="0"/>
           </a:p>
@@ -5293,7 +5330,7 @@
                 <a:ea typeface="Calibri" pitchFamily="34" charset="-122"/>
                 <a:cs typeface="Calibri" pitchFamily="34" charset="-120"/>
               </a:rPr>
-              <a:t>Separate a calm question from an angry customer, so frustrated and escalatory messages reach the front of the queue.</a:t>
+              <a:t>Frustrated or escalating customers can be flagged, so a person looks at them sooner.</a:t>
             </a:r>
             <a:endParaRPr lang="en-US" sz="1400" dirty="0"/>
           </a:p>
@@ -5365,7 +5402,7 @@
       </p:sp>
       <p:pic>
         <p:nvPicPr>
-          <p:cNvPr id="10" name="Image 1" descr="Measure how messages are handled"/>
+          <p:cNvPr id="10" name="Image 1" descr="Help write better replies"/>
           <p:cNvPicPr>
             <a:picLocks noChangeAspect="1"/>
           </p:cNvPicPr>
@@ -5420,7 +5457,7 @@
                 <a:ea typeface="Cambria" pitchFamily="34" charset="-122"/>
                 <a:cs typeface="Cambria" pitchFamily="34" charset="-120"/>
               </a:rPr>
-              <a:t>Measure how messages are handled</a:t>
+              <a:t>Help write better replies</a:t>
             </a:r>
             <a:endParaRPr lang="en-US" sz="2000" dirty="0"/>
           </a:p>
@@ -5459,7 +5496,7 @@
                 <a:ea typeface="Calibri" pitchFamily="34" charset="-122"/>
                 <a:cs typeface="Calibri" pitchFamily="34" charset="-120"/>
               </a:rPr>
-              <a:t>See whether agent replies calm customers down or make things worse, and coach the team with real examples.</a:t>
+              <a:t>Knowing a customer is upset helps an agent or a bot reply the right way, or hand over to a human.</a:t>
             </a:r>
             <a:endParaRPr lang="en-US" sz="1400" dirty="0"/>
           </a:p>
@@ -5531,14 +5568,14 @@
       </p:sp>
       <p:pic>
         <p:nvPicPr>
-          <p:cNvPr id="15" name="Image 2" descr="Retain customers, protect reputation"/>
+          <p:cNvPr id="15" name="Image 2" descr="Find repeated problems"/>
           <p:cNvPicPr>
             <a:picLocks noChangeAspect="1"/>
           </p:cNvPicPr>
           <p:nvPr/>
         </p:nvPicPr>
         <p:blipFill>
-          <a:blip r:embed="rId5"/>
+          <a:blip r:embed="rId6"/>
           <a:stretch>
             <a:fillRect/>
           </a:stretch>
@@ -5586,7 +5623,7 @@
                 <a:ea typeface="Cambria" pitchFamily="34" charset="-122"/>
                 <a:cs typeface="Cambria" pitchFamily="34" charset="-120"/>
               </a:rPr>
-              <a:t>Retain customers, protect reputation</a:t>
+              <a:t>Find repeated problems</a:t>
             </a:r>
             <a:endParaRPr lang="en-US" sz="2000" dirty="0"/>
           </a:p>
@@ -5625,7 +5662,7 @@
                 <a:ea typeface="Calibri" pitchFamily="34" charset="-122"/>
                 <a:cs typeface="Calibri" pitchFamily="34" charset="-120"/>
               </a:rPr>
-              <a:t>Keeping a customer is the hardest part in a competitive market. Twitter support is public, so poor responses are visible to everyone.</a:t>
+              <a:t>Many upset customers about the same issue, like late deliveries or refunds, point to something worth fixing.</a:t>
             </a:r>
             <a:endParaRPr lang="en-US" sz="1400" dirty="0"/>
           </a:p>
@@ -5697,14 +5734,14 @@
       </p:sp>
       <p:pic>
         <p:nvPicPr>
-          <p:cNvPr id="20" name="Image 3" descr="Reveal system problems"/>
+          <p:cNvPr id="20" name="Image 3" descr="New labels for a hard problem"/>
           <p:cNvPicPr>
             <a:picLocks noChangeAspect="1"/>
           </p:cNvPicPr>
           <p:nvPr/>
         </p:nvPicPr>
         <p:blipFill>
-          <a:blip r:embed="rId6"/>
+          <a:blip r:embed="rId7"/>
           <a:stretch>
             <a:fillRect/>
           </a:stretch>
@@ -5752,7 +5789,7 @@
                 <a:ea typeface="Cambria" pitchFamily="34" charset="-122"/>
                 <a:cs typeface="Cambria" pitchFamily="34" charset="-120"/>
               </a:rPr>
-              <a:t>Reveal system problems</a:t>
+              <a:t>New labels for a hard problem</a:t>
             </a:r>
             <a:endParaRPr lang="en-US" sz="2000" dirty="0"/>
           </a:p>
@@ -5791,7 +5828,7 @@
                 <a:ea typeface="Calibri" pitchFamily="34" charset="-122"/>
                 <a:cs typeface="Calibri" pitchFamily="34" charset="-120"/>
               </a:rPr>
-              <a:t>Many frustrated messages about the same issue, such as late deliveries or refunds, can point to a system or process fault.</a:t>
+              <a:t>2.8M support tweets, zero tone labels. “Thanks a lot” can be praise or sarcasm, so you need the whole conversation.</a:t>
             </a:r>
             <a:endParaRPr lang="en-US" sz="1400" dirty="0"/>
           </a:p>
@@ -5943,7 +5980,7 @@
                 <a:ea typeface="Calibri" pitchFamily="34" charset="-122"/>
                 <a:cs typeface="Calibri" pitchFamily="34" charset="-120"/>
               </a:rPr>
-              <a:t>Read a customer-support conversation and label the customer's tone, based on how the customer ends the conversation.</a:t>
+              <a:t>Classify the customer's overall tone across the complete conversation. Agent replies provide context; the last message alone may be misleading.</a:t>
             </a:r>
             <a:endParaRPr lang="en-US" sz="2000" dirty="0"/>
           </a:p>
@@ -6887,18 +6924,7 @@
                 <a:ea typeface="Calibri" pitchFamily="34" charset="-122"/>
                 <a:cs typeface="Calibri" pitchFamily="34" charset="-120"/>
               </a:rPr>
-              <a:t>If more than one tone fits, use this order: </a:t>
-            </a:r>
-            <a:r>
-              <a:rPr lang="en-US" sz="1800" dirty="0">
-                <a:solidFill>
-                  <a:schemeClr val="tx1"/>
-                </a:solidFill>
-                <a:latin typeface="Calibri" pitchFamily="34" charset="0"/>
-                <a:ea typeface="Calibri" pitchFamily="34" charset="-122"/>
-                <a:cs typeface="Calibri" pitchFamily="34" charset="-120"/>
-              </a:rPr>
-              <a:t>Escalatory, Frustrated, Help-seeking, Appreciative, Neutral.</a:t>
+              <a:t>When multiple tones apply across the exchange: Escalatory, Frustrated, Help-seeking, Appreciative, Neutral.</a:t>
             </a:r>
             <a:endParaRPr lang="en-US" sz="1800" dirty="0"/>
           </a:p>
@@ -7358,7 +7384,7 @@
               <a:buNone/>
             </a:pPr>
             <a:r>
-              <a:rPr lang="en-US" sz="1400" dirty="0">
+              <a:rPr lang="en-US" sz="1500" dirty="0">
                 <a:solidFill>
                   <a:schemeClr val="tx2"/>
                 </a:solidFill>
@@ -7395,7 +7421,7 @@
               <a:buNone/>
             </a:pPr>
             <a:r>
-              <a:rPr lang="en-US" sz="1400" dirty="0">
+              <a:rPr lang="en-US" sz="1500" dirty="0">
                 <a:solidFill>
                   <a:schemeClr val="tx2"/>
                 </a:solidFill>
@@ -7432,7 +7458,7 @@
               <a:buNone/>
             </a:pPr>
             <a:r>
-              <a:rPr lang="en-US" sz="1400" dirty="0">
+              <a:rPr lang="en-US" sz="1500" dirty="0">
                 <a:solidFill>
                   <a:schemeClr val="tx2"/>
                 </a:solidFill>
@@ -7440,7 +7466,7 @@
                 <a:ea typeface="Calibri" pitchFamily="34" charset="-122"/>
                 <a:cs typeface="Calibri" pitchFamily="34" charset="-120"/>
               </a:rPr>
-              <a:t>The customer asks for nothing and volunteers enthusiasm, then closes with "Awesome thanks". Everything points to satisfaction.</a:t>
+              <a:t>The customer expresses enthusiasm in both messages, praising the movie and saying “Awesome thanks”. The exchange supports an Appreciative label.</a:t>
             </a:r>
             <a:endParaRPr lang="en-US" sz="1600" dirty="0"/>
           </a:p>
@@ -7455,7 +7481,7 @@
         <p:spPr>
           <a:xfrm>
             <a:off x="5852160" y="2148840"/>
-            <a:ext cx="5760720" cy="640080"/>
+            <a:ext cx="5760720" cy="932688"/>
           </a:xfrm>
           <a:prstGeom prst="roundRect">
             <a:avLst>
@@ -7472,14 +7498,16 @@
           </a:ln>
         </p:spPr>
         <p:txBody>
-          <a:bodyPr wrap="square" lIns="381" tIns="2540" rIns="2540" bIns="381" rtlCol="0" anchor="ctr"/>
+          <a:bodyPr wrap="square" lIns="381" tIns="2540" rIns="2540" bIns="381" rtlCol="0" anchor="ctr">
+            <a:noAutofit/>
+          </a:bodyPr>
           <a:lstStyle/>
           <a:p>
             <a:pPr marL="0" indent="0">
               <a:buNone/>
             </a:pPr>
             <a:r>
-              <a:rPr lang="en-US" sz="1400" b="1" dirty="0">
+              <a:rPr lang="en-US" sz="1600" b="1" dirty="0">
                 <a:solidFill>
                   <a:schemeClr val="bg1"/>
                 </a:solidFill>
@@ -7490,7 +7518,7 @@
               <a:t>Customer: </a:t>
             </a:r>
             <a:r>
-              <a:rPr lang="en-US" sz="1400" dirty="0">
+              <a:rPr lang="en-US" sz="1600" dirty="0">
                 <a:solidFill>
                   <a:schemeClr val="bg1"/>
                 </a:solidFill>
@@ -7512,8 +7540,8 @@
         </p:nvSpPr>
         <p:spPr>
           <a:xfrm>
-            <a:off x="5029200" y="2907792"/>
-            <a:ext cx="5760720" cy="502920"/>
+            <a:off x="5029200" y="3172968"/>
+            <a:ext cx="5760720" cy="530352"/>
           </a:xfrm>
           <a:prstGeom prst="roundRect">
             <a:avLst>
@@ -7530,14 +7558,16 @@
           </a:ln>
         </p:spPr>
         <p:txBody>
-          <a:bodyPr wrap="square" lIns="381" tIns="2540" rIns="2540" bIns="381" rtlCol="0" anchor="ctr"/>
+          <a:bodyPr wrap="square" lIns="381" tIns="2540" rIns="2540" bIns="381" rtlCol="0" anchor="ctr">
+            <a:noAutofit/>
+          </a:bodyPr>
           <a:lstStyle/>
           <a:p>
             <a:pPr marL="0" indent="0">
               <a:buNone/>
             </a:pPr>
             <a:r>
-              <a:rPr lang="en-US" sz="1400" b="1" dirty="0">
+              <a:rPr lang="en-US" sz="1600" b="1" dirty="0">
                 <a:solidFill>
                   <a:schemeClr val="tx1"/>
                 </a:solidFill>
@@ -7548,7 +7578,7 @@
               <a:t>Support: </a:t>
             </a:r>
             <a:r>
-              <a:rPr lang="en-US" sz="1400" dirty="0">
+              <a:rPr lang="en-US" sz="1600" dirty="0">
                 <a:solidFill>
                   <a:schemeClr val="tx1"/>
                 </a:solidFill>
@@ -7570,8 +7600,8 @@
         </p:nvSpPr>
         <p:spPr>
           <a:xfrm>
-            <a:off x="5852160" y="3529584"/>
-            <a:ext cx="5760720" cy="502920"/>
+            <a:off x="5852160" y="3794760"/>
+            <a:ext cx="5760720" cy="530352"/>
           </a:xfrm>
           <a:prstGeom prst="roundRect">
             <a:avLst>
@@ -7588,14 +7618,16 @@
           </a:ln>
         </p:spPr>
         <p:txBody>
-          <a:bodyPr wrap="square" lIns="381" tIns="2540" rIns="2540" bIns="381" rtlCol="0" anchor="ctr"/>
+          <a:bodyPr wrap="square" lIns="381" tIns="2540" rIns="2540" bIns="381" rtlCol="0" anchor="ctr">
+            <a:noAutofit/>
+          </a:bodyPr>
           <a:lstStyle/>
           <a:p>
             <a:pPr marL="0" indent="0">
               <a:buNone/>
             </a:pPr>
             <a:r>
-              <a:rPr lang="en-US" sz="1400" b="1" dirty="0">
+              <a:rPr lang="en-US" sz="1600" b="1" dirty="0">
                 <a:solidFill>
                   <a:schemeClr val="bg1"/>
                 </a:solidFill>
@@ -7606,7 +7638,7 @@
               <a:t>Customer: </a:t>
             </a:r>
             <a:r>
-              <a:rPr lang="en-US" sz="1400" dirty="0">
+              <a:rPr lang="en-US" sz="1600" dirty="0">
                 <a:solidFill>
                   <a:schemeClr val="bg1"/>
                 </a:solidFill>
@@ -7628,8 +7660,8 @@
         </p:nvSpPr>
         <p:spPr>
           <a:xfrm>
-            <a:off x="5029200" y="4151376"/>
-            <a:ext cx="5760720" cy="502920"/>
+            <a:off x="5029200" y="4416552"/>
+            <a:ext cx="5760720" cy="530352"/>
           </a:xfrm>
           <a:prstGeom prst="roundRect">
             <a:avLst>
@@ -7646,14 +7678,16 @@
           </a:ln>
         </p:spPr>
         <p:txBody>
-          <a:bodyPr wrap="square" lIns="381" tIns="2540" rIns="2540" bIns="381" rtlCol="0" anchor="ctr"/>
+          <a:bodyPr wrap="square" lIns="381" tIns="2540" rIns="2540" bIns="381" rtlCol="0" anchor="ctr">
+            <a:noAutofit/>
+          </a:bodyPr>
           <a:lstStyle/>
           <a:p>
             <a:pPr marL="0" indent="0">
               <a:buNone/>
             </a:pPr>
             <a:r>
-              <a:rPr lang="en-US" sz="1400" b="1" dirty="0">
+              <a:rPr lang="en-US" sz="1600" b="1" dirty="0">
                 <a:solidFill>
                   <a:schemeClr val="tx1"/>
                 </a:solidFill>
@@ -7664,7 +7698,7 @@
               <a:t>Support: </a:t>
             </a:r>
             <a:r>
-              <a:rPr lang="en-US" sz="1400" dirty="0">
+              <a:rPr lang="en-US" sz="1600" dirty="0">
                 <a:solidFill>
                   <a:schemeClr val="tx1"/>
                 </a:solidFill>
@@ -8377,7 +8411,7 @@
               <a:buNone/>
             </a:pPr>
             <a:r>
-              <a:rPr lang="en-US" sz="1400" dirty="0">
+              <a:rPr lang="en-US" sz="1500" dirty="0">
                 <a:solidFill>
                   <a:schemeClr val="tx2"/>
                 </a:solidFill>
@@ -8414,7 +8448,7 @@
               <a:buNone/>
             </a:pPr>
             <a:r>
-              <a:rPr lang="en-US" sz="1400" dirty="0">
+              <a:rPr lang="en-US" sz="1500" dirty="0">
                 <a:solidFill>
                   <a:schemeClr val="tx2"/>
                 </a:solidFill>
@@ -8451,7 +8485,7 @@
               <a:buNone/>
             </a:pPr>
             <a:r>
-              <a:rPr lang="en-US" sz="1400" dirty="0">
+              <a:rPr lang="en-US" sz="1500" dirty="0">
                 <a:solidFill>
                   <a:schemeClr val="tx2"/>
                 </a:solidFill>
@@ -8474,7 +8508,7 @@
         <p:spPr>
           <a:xfrm>
             <a:off x="5852160" y="2148840"/>
-            <a:ext cx="5760720" cy="640080"/>
+            <a:ext cx="5760720" cy="932688"/>
           </a:xfrm>
           <a:prstGeom prst="roundRect">
             <a:avLst>
@@ -8491,14 +8525,16 @@
           </a:ln>
         </p:spPr>
         <p:txBody>
-          <a:bodyPr wrap="square" lIns="381" tIns="2540" rIns="2540" bIns="381" rtlCol="0" anchor="ctr"/>
+          <a:bodyPr wrap="square" lIns="381" tIns="2540" rIns="2540" bIns="381" rtlCol="0" anchor="ctr">
+            <a:noAutofit/>
+          </a:bodyPr>
           <a:lstStyle/>
           <a:p>
             <a:pPr marL="0" indent="0">
               <a:buNone/>
             </a:pPr>
             <a:r>
-              <a:rPr lang="en-US" sz="1400" b="1" dirty="0">
+              <a:rPr lang="en-US" sz="1600" b="1" dirty="0">
                 <a:solidFill>
                   <a:schemeClr val="bg1"/>
                 </a:solidFill>
@@ -8509,7 +8545,7 @@
               <a:t>Customer: </a:t>
             </a:r>
             <a:r>
-              <a:rPr lang="en-US" sz="1400" dirty="0">
+              <a:rPr lang="en-US" sz="1600" dirty="0">
                 <a:solidFill>
                   <a:schemeClr val="bg1"/>
                 </a:solidFill>
@@ -8531,8 +8567,8 @@
         </p:nvSpPr>
         <p:spPr>
           <a:xfrm>
-            <a:off x="5029200" y="2907792"/>
-            <a:ext cx="5760720" cy="640080"/>
+            <a:off x="5029200" y="3172968"/>
+            <a:ext cx="5760720" cy="932688"/>
           </a:xfrm>
           <a:prstGeom prst="roundRect">
             <a:avLst>
@@ -8549,14 +8585,16 @@
           </a:ln>
         </p:spPr>
         <p:txBody>
-          <a:bodyPr wrap="square" lIns="381" tIns="2540" rIns="2540" bIns="381" rtlCol="0" anchor="ctr"/>
+          <a:bodyPr wrap="square" lIns="381" tIns="2540" rIns="2540" bIns="381" rtlCol="0" anchor="ctr">
+            <a:noAutofit/>
+          </a:bodyPr>
           <a:lstStyle/>
           <a:p>
             <a:pPr marL="0" indent="0">
               <a:buNone/>
             </a:pPr>
             <a:r>
-              <a:rPr lang="en-US" sz="1400" b="1" dirty="0">
+              <a:rPr lang="en-US" sz="1600" b="1" dirty="0">
                 <a:solidFill>
                   <a:schemeClr val="tx1"/>
                 </a:solidFill>
@@ -8567,7 +8605,7 @@
               <a:t>Support: </a:t>
             </a:r>
             <a:r>
-              <a:rPr lang="en-US" sz="1400" dirty="0">
+              <a:rPr lang="en-US" sz="1600" dirty="0">
                 <a:solidFill>
                   <a:schemeClr val="tx1"/>
                 </a:solidFill>
@@ -8589,8 +8627,8 @@
         </p:nvSpPr>
         <p:spPr>
           <a:xfrm>
-            <a:off x="5852160" y="3666744"/>
-            <a:ext cx="5760720" cy="502920"/>
+            <a:off x="5852160" y="4197096"/>
+            <a:ext cx="5760720" cy="530352"/>
           </a:xfrm>
           <a:prstGeom prst="roundRect">
             <a:avLst>
@@ -8607,14 +8645,16 @@
           </a:ln>
         </p:spPr>
         <p:txBody>
-          <a:bodyPr wrap="square" lIns="381" tIns="2540" rIns="2540" bIns="381" rtlCol="0" anchor="ctr"/>
+          <a:bodyPr wrap="square" lIns="381" tIns="2540" rIns="2540" bIns="381" rtlCol="0" anchor="ctr">
+            <a:noAutofit/>
+          </a:bodyPr>
           <a:lstStyle/>
           <a:p>
             <a:pPr marL="0" indent="0">
               <a:buNone/>
             </a:pPr>
             <a:r>
-              <a:rPr lang="en-US" sz="1400" b="1" dirty="0">
+              <a:rPr lang="en-US" sz="1600" b="1" dirty="0">
                 <a:solidFill>
                   <a:schemeClr val="bg1"/>
                 </a:solidFill>
@@ -8625,7 +8665,7 @@
               <a:t>Customer: </a:t>
             </a:r>
             <a:r>
-              <a:rPr lang="en-US" sz="1400" dirty="0">
+              <a:rPr lang="en-US" sz="1600" dirty="0">
                 <a:solidFill>
                   <a:schemeClr val="bg1"/>
                 </a:solidFill>
@@ -8647,8 +8687,8 @@
         </p:nvSpPr>
         <p:spPr>
           <a:xfrm>
-            <a:off x="5029200" y="4288536"/>
-            <a:ext cx="5760720" cy="640080"/>
+            <a:off x="5029200" y="4818888"/>
+            <a:ext cx="5760720" cy="749808"/>
           </a:xfrm>
           <a:prstGeom prst="roundRect">
             <a:avLst>
@@ -8665,14 +8705,16 @@
           </a:ln>
         </p:spPr>
         <p:txBody>
-          <a:bodyPr wrap="square" lIns="381" tIns="2540" rIns="2540" bIns="381" rtlCol="0" anchor="ctr"/>
+          <a:bodyPr wrap="square" lIns="381" tIns="2540" rIns="2540" bIns="381" rtlCol="0" anchor="ctr">
+            <a:noAutofit/>
+          </a:bodyPr>
           <a:lstStyle/>
           <a:p>
             <a:pPr marL="0" indent="0">
               <a:buNone/>
             </a:pPr>
             <a:r>
-              <a:rPr lang="en-US" sz="1400" b="1" dirty="0">
+              <a:rPr lang="en-US" sz="1600" b="1" dirty="0">
                 <a:solidFill>
                   <a:schemeClr val="tx1"/>
                 </a:solidFill>
@@ -8683,7 +8725,7 @@
               <a:t>Support: </a:t>
             </a:r>
             <a:r>
-              <a:rPr lang="en-US" sz="1400" dirty="0">
+              <a:rPr lang="en-US" sz="1600" dirty="0">
                 <a:solidFill>
                   <a:schemeClr val="tx1"/>
                 </a:solidFill>
@@ -9396,7 +9438,7 @@
               <a:buNone/>
             </a:pPr>
             <a:r>
-              <a:rPr lang="en-US" sz="1400" dirty="0">
+              <a:rPr lang="en-US" sz="1500" dirty="0">
                 <a:solidFill>
                   <a:schemeClr val="tx2"/>
                 </a:solidFill>
@@ -9433,7 +9475,7 @@
               <a:buNone/>
             </a:pPr>
             <a:r>
-              <a:rPr lang="en-US" sz="1400" dirty="0">
+              <a:rPr lang="en-US" sz="1500" dirty="0">
                 <a:solidFill>
                   <a:schemeClr val="tx2"/>
                 </a:solidFill>
@@ -9470,7 +9512,7 @@
               <a:buNone/>
             </a:pPr>
             <a:r>
-              <a:rPr lang="en-US" sz="1400" dirty="0">
+              <a:rPr lang="en-US" sz="1500" dirty="0">
                 <a:solidFill>
                   <a:schemeClr val="tx2"/>
                 </a:solidFill>
@@ -9493,7 +9535,7 @@
         <p:spPr>
           <a:xfrm>
             <a:off x="5852160" y="2148840"/>
-            <a:ext cx="5760720" cy="640080"/>
+            <a:ext cx="5760720" cy="749808"/>
           </a:xfrm>
           <a:prstGeom prst="roundRect">
             <a:avLst>
@@ -9510,14 +9552,16 @@
           </a:ln>
         </p:spPr>
         <p:txBody>
-          <a:bodyPr wrap="square" lIns="381" tIns="2540" rIns="2540" bIns="381" rtlCol="0" anchor="ctr"/>
+          <a:bodyPr wrap="square" lIns="381" tIns="2540" rIns="2540" bIns="381" rtlCol="0" anchor="ctr">
+            <a:noAutofit/>
+          </a:bodyPr>
           <a:lstStyle/>
           <a:p>
             <a:pPr marL="0" indent="0">
               <a:buNone/>
             </a:pPr>
             <a:r>
-              <a:rPr lang="en-US" sz="1400" b="1" dirty="0">
+              <a:rPr lang="en-US" sz="1600" b="1" dirty="0">
                 <a:solidFill>
                   <a:schemeClr val="bg1"/>
                 </a:solidFill>
@@ -9528,7 +9572,7 @@
               <a:t>Customer: </a:t>
             </a:r>
             <a:r>
-              <a:rPr lang="en-US" sz="1400" dirty="0">
+              <a:rPr lang="en-US" sz="1600" dirty="0">
                 <a:solidFill>
                   <a:schemeClr val="bg1"/>
                 </a:solidFill>
@@ -9550,8 +9594,8 @@
         </p:nvSpPr>
         <p:spPr>
           <a:xfrm>
-            <a:off x="5029200" y="2907792"/>
-            <a:ext cx="5760720" cy="640080"/>
+            <a:off x="5029200" y="2990088"/>
+            <a:ext cx="5760720" cy="749808"/>
           </a:xfrm>
           <a:prstGeom prst="roundRect">
             <a:avLst>
@@ -9568,14 +9612,16 @@
           </a:ln>
         </p:spPr>
         <p:txBody>
-          <a:bodyPr wrap="square" lIns="381" tIns="2540" rIns="2540" bIns="381" rtlCol="0" anchor="ctr"/>
+          <a:bodyPr wrap="square" lIns="381" tIns="2540" rIns="2540" bIns="381" rtlCol="0" anchor="ctr">
+            <a:noAutofit/>
+          </a:bodyPr>
           <a:lstStyle/>
           <a:p>
             <a:pPr marL="0" indent="0">
               <a:buNone/>
             </a:pPr>
             <a:r>
-              <a:rPr lang="en-US" sz="1400" b="1" dirty="0">
+              <a:rPr lang="en-US" sz="1600" b="1" dirty="0">
                 <a:solidFill>
                   <a:schemeClr val="tx1"/>
                 </a:solidFill>
@@ -9586,7 +9632,7 @@
               <a:t>Support: </a:t>
             </a:r>
             <a:r>
-              <a:rPr lang="en-US" sz="1400" dirty="0">
+              <a:rPr lang="en-US" sz="1600" dirty="0">
                 <a:solidFill>
                   <a:schemeClr val="tx1"/>
                 </a:solidFill>
@@ -9608,8 +9654,8 @@
         </p:nvSpPr>
         <p:spPr>
           <a:xfrm>
-            <a:off x="5852160" y="3666744"/>
-            <a:ext cx="5760720" cy="502920"/>
+            <a:off x="5852160" y="3831335"/>
+            <a:ext cx="5760720" cy="749808"/>
           </a:xfrm>
           <a:prstGeom prst="roundRect">
             <a:avLst>
@@ -9626,14 +9672,16 @@
           </a:ln>
         </p:spPr>
         <p:txBody>
-          <a:bodyPr wrap="square" lIns="381" tIns="2540" rIns="2540" bIns="381" rtlCol="0" anchor="ctr"/>
+          <a:bodyPr wrap="square" lIns="381" tIns="2540" rIns="2540" bIns="381" rtlCol="0" anchor="ctr">
+            <a:noAutofit/>
+          </a:bodyPr>
           <a:lstStyle/>
           <a:p>
             <a:pPr marL="0" indent="0">
               <a:buNone/>
             </a:pPr>
             <a:r>
-              <a:rPr lang="en-US" sz="1400" b="1" dirty="0">
+              <a:rPr lang="en-US" sz="1600" b="1" dirty="0">
                 <a:solidFill>
                   <a:schemeClr val="bg1"/>
                 </a:solidFill>
@@ -9644,7 +9692,7 @@
               <a:t>Customer: </a:t>
             </a:r>
             <a:r>
-              <a:rPr lang="en-US" sz="1400" dirty="0">
+              <a:rPr lang="en-US" sz="1600" dirty="0">
                 <a:solidFill>
                   <a:schemeClr val="bg1"/>
                 </a:solidFill>
@@ -9666,8 +9714,8 @@
         </p:nvSpPr>
         <p:spPr>
           <a:xfrm>
-            <a:off x="5029200" y="4288536"/>
-            <a:ext cx="5760720" cy="640080"/>
+            <a:off x="5029200" y="4672583"/>
+            <a:ext cx="5760720" cy="749808"/>
           </a:xfrm>
           <a:prstGeom prst="roundRect">
             <a:avLst>
@@ -9684,14 +9732,16 @@
           </a:ln>
         </p:spPr>
         <p:txBody>
-          <a:bodyPr wrap="square" lIns="381" tIns="2540" rIns="2540" bIns="381" rtlCol="0" anchor="ctr"/>
+          <a:bodyPr wrap="square" lIns="381" tIns="2540" rIns="2540" bIns="381" rtlCol="0" anchor="ctr">
+            <a:noAutofit/>
+          </a:bodyPr>
           <a:lstStyle/>
           <a:p>
             <a:pPr marL="0" indent="0">
               <a:buNone/>
             </a:pPr>
             <a:r>
-              <a:rPr lang="en-US" sz="1400" b="1" dirty="0">
+              <a:rPr lang="en-US" sz="1600" b="1" dirty="0">
                 <a:solidFill>
                   <a:schemeClr val="tx1"/>
                 </a:solidFill>
@@ -9702,7 +9752,7 @@
               <a:t>Support: </a:t>
             </a:r>
             <a:r>
-              <a:rPr lang="en-US" sz="1400" dirty="0">
+              <a:rPr lang="en-US" sz="1600" dirty="0">
                 <a:solidFill>
                   <a:schemeClr val="tx1"/>
                 </a:solidFill>
@@ -10415,7 +10465,7 @@
               <a:buNone/>
             </a:pPr>
             <a:r>
-              <a:rPr lang="en-US" sz="1400" dirty="0">
+              <a:rPr lang="en-US" sz="1500" dirty="0">
                 <a:solidFill>
                   <a:schemeClr val="tx2"/>
                 </a:solidFill>
@@ -10452,7 +10502,7 @@
               <a:buNone/>
             </a:pPr>
             <a:r>
-              <a:rPr lang="en-US" sz="1400" dirty="0">
+              <a:rPr lang="en-US" sz="1500" dirty="0">
                 <a:solidFill>
                   <a:schemeClr val="tx2"/>
                 </a:solidFill>
@@ -10489,7 +10539,7 @@
               <a:buNone/>
             </a:pPr>
             <a:r>
-              <a:rPr lang="en-US" sz="1400" dirty="0">
+              <a:rPr lang="en-US" sz="1500" dirty="0">
                 <a:solidFill>
                   <a:schemeClr val="tx2"/>
                 </a:solidFill>
@@ -10512,7 +10562,7 @@
         <p:spPr>
           <a:xfrm>
             <a:off x="5852160" y="2148840"/>
-            <a:ext cx="5760720" cy="640080"/>
+            <a:ext cx="5760720" cy="749808"/>
           </a:xfrm>
           <a:prstGeom prst="roundRect">
             <a:avLst>
@@ -10529,14 +10579,16 @@
           </a:ln>
         </p:spPr>
         <p:txBody>
-          <a:bodyPr wrap="square" lIns="381" tIns="2540" rIns="2540" bIns="381" rtlCol="0" anchor="ctr"/>
+          <a:bodyPr wrap="square" lIns="381" tIns="2540" rIns="2540" bIns="381" rtlCol="0" anchor="ctr">
+            <a:noAutofit/>
+          </a:bodyPr>
           <a:lstStyle/>
           <a:p>
             <a:pPr marL="0" indent="0">
               <a:buNone/>
             </a:pPr>
             <a:r>
-              <a:rPr lang="en-US" sz="1400" b="1" dirty="0">
+              <a:rPr lang="en-US" sz="1600" b="1" dirty="0">
                 <a:solidFill>
                   <a:schemeClr val="bg1"/>
                 </a:solidFill>
@@ -10547,7 +10599,7 @@
               <a:t>Customer: </a:t>
             </a:r>
             <a:r>
-              <a:rPr lang="en-US" sz="1400" dirty="0">
+              <a:rPr lang="en-US" sz="1600" dirty="0">
                 <a:solidFill>
                   <a:schemeClr val="bg1"/>
                 </a:solidFill>
@@ -10569,8 +10621,8 @@
         </p:nvSpPr>
         <p:spPr>
           <a:xfrm>
-            <a:off x="5029200" y="2907792"/>
-            <a:ext cx="5760720" cy="502920"/>
+            <a:off x="5029200" y="2990088"/>
+            <a:ext cx="5760720" cy="749808"/>
           </a:xfrm>
           <a:prstGeom prst="roundRect">
             <a:avLst>
@@ -10587,14 +10639,16 @@
           </a:ln>
         </p:spPr>
         <p:txBody>
-          <a:bodyPr wrap="square" lIns="381" tIns="2540" rIns="2540" bIns="381" rtlCol="0" anchor="ctr"/>
+          <a:bodyPr wrap="square" lIns="381" tIns="2540" rIns="2540" bIns="381" rtlCol="0" anchor="ctr">
+            <a:noAutofit/>
+          </a:bodyPr>
           <a:lstStyle/>
           <a:p>
             <a:pPr marL="0" indent="0">
               <a:buNone/>
             </a:pPr>
             <a:r>
-              <a:rPr lang="en-US" sz="1400" b="1" dirty="0">
+              <a:rPr lang="en-US" sz="1600" b="1" dirty="0">
                 <a:solidFill>
                   <a:schemeClr val="tx1"/>
                 </a:solidFill>
@@ -10605,7 +10659,7 @@
               <a:t>Support: </a:t>
             </a:r>
             <a:r>
-              <a:rPr lang="en-US" sz="1400" dirty="0">
+              <a:rPr lang="en-US" sz="1600" dirty="0">
                 <a:solidFill>
                   <a:schemeClr val="tx1"/>
                 </a:solidFill>
@@ -10627,8 +10681,8 @@
         </p:nvSpPr>
         <p:spPr>
           <a:xfrm>
-            <a:off x="5852160" y="3529584"/>
-            <a:ext cx="5760720" cy="640080"/>
+            <a:off x="5852160" y="3831335"/>
+            <a:ext cx="5760720" cy="749808"/>
           </a:xfrm>
           <a:prstGeom prst="roundRect">
             <a:avLst>
@@ -10645,14 +10699,16 @@
           </a:ln>
         </p:spPr>
         <p:txBody>
-          <a:bodyPr wrap="square" lIns="381" tIns="2540" rIns="2540" bIns="381" rtlCol="0" anchor="ctr"/>
+          <a:bodyPr wrap="square" lIns="381" tIns="2540" rIns="2540" bIns="381" rtlCol="0" anchor="ctr">
+            <a:noAutofit/>
+          </a:bodyPr>
           <a:lstStyle/>
           <a:p>
             <a:pPr marL="0" indent="0">
               <a:buNone/>
             </a:pPr>
             <a:r>
-              <a:rPr lang="en-US" sz="1400" b="1" dirty="0">
+              <a:rPr lang="en-US" sz="1600" b="1" dirty="0">
                 <a:solidFill>
                   <a:schemeClr val="bg1"/>
                 </a:solidFill>
@@ -10663,7 +10719,7 @@
               <a:t>Customer: </a:t>
             </a:r>
             <a:r>
-              <a:rPr lang="en-US" sz="1400" dirty="0">
+              <a:rPr lang="en-US" sz="1600" dirty="0">
                 <a:solidFill>
                   <a:schemeClr val="bg1"/>
                 </a:solidFill>
@@ -10685,8 +10741,8 @@
         </p:nvSpPr>
         <p:spPr>
           <a:xfrm>
-            <a:off x="5029200" y="4288536"/>
-            <a:ext cx="5760720" cy="502920"/>
+            <a:off x="5029200" y="4672583"/>
+            <a:ext cx="5760720" cy="749808"/>
           </a:xfrm>
           <a:prstGeom prst="roundRect">
             <a:avLst>
@@ -10703,14 +10759,16 @@
           </a:ln>
         </p:spPr>
         <p:txBody>
-          <a:bodyPr wrap="square" lIns="381" tIns="2540" rIns="2540" bIns="381" rtlCol="0" anchor="ctr"/>
+          <a:bodyPr wrap="square" lIns="381" tIns="2540" rIns="2540" bIns="381" rtlCol="0" anchor="ctr">
+            <a:noAutofit/>
+          </a:bodyPr>
           <a:lstStyle/>
           <a:p>
             <a:pPr marL="0" indent="0">
               <a:buNone/>
             </a:pPr>
             <a:r>
-              <a:rPr lang="en-US" sz="1400" b="1" dirty="0">
+              <a:rPr lang="en-US" sz="1600" b="1" dirty="0">
                 <a:solidFill>
                   <a:schemeClr val="tx1"/>
                 </a:solidFill>
@@ -10721,7 +10779,7 @@
               <a:t>Support: </a:t>
             </a:r>
             <a:r>
-              <a:rPr lang="en-US" sz="1400" dirty="0">
+              <a:rPr lang="en-US" sz="1600" dirty="0">
                 <a:solidFill>
                   <a:schemeClr val="tx1"/>
                 </a:solidFill>
@@ -11434,7 +11492,7 @@
               <a:buNone/>
             </a:pPr>
             <a:r>
-              <a:rPr lang="en-US" sz="1400" dirty="0">
+              <a:rPr lang="en-US" sz="1500" dirty="0">
                 <a:solidFill>
                   <a:schemeClr val="tx2"/>
                 </a:solidFill>
@@ -11471,7 +11529,7 @@
               <a:buNone/>
             </a:pPr>
             <a:r>
-              <a:rPr lang="en-US" sz="1400" dirty="0">
+              <a:rPr lang="en-US" sz="1500" dirty="0">
                 <a:solidFill>
                   <a:schemeClr val="tx2"/>
                 </a:solidFill>
@@ -11508,7 +11566,7 @@
               <a:buNone/>
             </a:pPr>
             <a:r>
-              <a:rPr lang="en-US" sz="1400" dirty="0">
+              <a:rPr lang="en-US" sz="1500" dirty="0">
                 <a:solidFill>
                   <a:schemeClr val="tx2"/>
                 </a:solidFill>
@@ -11531,7 +11589,7 @@
         <p:spPr>
           <a:xfrm>
             <a:off x="5852160" y="2148840"/>
-            <a:ext cx="5760720" cy="640080"/>
+            <a:ext cx="5760720" cy="777240"/>
           </a:xfrm>
           <a:prstGeom prst="roundRect">
             <a:avLst>
@@ -11548,14 +11606,16 @@
           </a:ln>
         </p:spPr>
         <p:txBody>
-          <a:bodyPr wrap="square" lIns="381" tIns="2540" rIns="2540" bIns="381" rtlCol="0" anchor="ctr"/>
+          <a:bodyPr wrap="square" lIns="381" tIns="2540" rIns="2540" bIns="381" rtlCol="0" anchor="ctr">
+            <a:noAutofit/>
+          </a:bodyPr>
           <a:lstStyle/>
           <a:p>
             <a:pPr marL="0" indent="0">
               <a:buNone/>
             </a:pPr>
             <a:r>
-              <a:rPr lang="en-US" sz="1400" b="1" dirty="0">
+              <a:rPr lang="en-US" sz="1500" b="1" dirty="0">
                 <a:solidFill>
                   <a:schemeClr val="bg1"/>
                 </a:solidFill>
@@ -11566,7 +11626,7 @@
               <a:t>Customer: </a:t>
             </a:r>
             <a:r>
-              <a:rPr lang="en-US" sz="1400" dirty="0">
+              <a:rPr lang="en-US" sz="1500" dirty="0">
                 <a:solidFill>
                   <a:schemeClr val="bg1"/>
                 </a:solidFill>
@@ -11588,8 +11648,8 @@
         </p:nvSpPr>
         <p:spPr>
           <a:xfrm>
-            <a:off x="5029200" y="2907792"/>
-            <a:ext cx="5760720" cy="640080"/>
+            <a:off x="5029200" y="2965399"/>
+            <a:ext cx="5760720" cy="777240"/>
           </a:xfrm>
           <a:prstGeom prst="roundRect">
             <a:avLst>
@@ -11606,14 +11666,16 @@
           </a:ln>
         </p:spPr>
         <p:txBody>
-          <a:bodyPr wrap="square" lIns="381" tIns="2540" rIns="2540" bIns="381" rtlCol="0" anchor="ctr"/>
+          <a:bodyPr wrap="square" lIns="381" tIns="2540" rIns="2540" bIns="381" rtlCol="0" anchor="ctr">
+            <a:noAutofit/>
+          </a:bodyPr>
           <a:lstStyle/>
           <a:p>
             <a:pPr marL="0" indent="0">
               <a:buNone/>
             </a:pPr>
             <a:r>
-              <a:rPr lang="en-US" sz="1400" b="1" dirty="0">
+              <a:rPr lang="en-US" sz="1500" b="1" dirty="0">
                 <a:solidFill>
                   <a:schemeClr val="tx1"/>
                 </a:solidFill>
@@ -11624,7 +11686,7 @@
               <a:t>Support: </a:t>
             </a:r>
             <a:r>
-              <a:rPr lang="en-US" sz="1400" dirty="0">
+              <a:rPr lang="en-US" sz="1500" dirty="0">
                 <a:solidFill>
                   <a:schemeClr val="tx1"/>
                 </a:solidFill>
@@ -11646,8 +11708,8 @@
         </p:nvSpPr>
         <p:spPr>
           <a:xfrm>
-            <a:off x="5852160" y="3666744"/>
-            <a:ext cx="5760720" cy="859536"/>
+            <a:off x="5852160" y="3781958"/>
+            <a:ext cx="5760720" cy="932688"/>
           </a:xfrm>
           <a:prstGeom prst="roundRect">
             <a:avLst>
@@ -11664,14 +11726,16 @@
           </a:ln>
         </p:spPr>
         <p:txBody>
-          <a:bodyPr wrap="square" lIns="381" tIns="2540" rIns="2540" bIns="381" rtlCol="0" anchor="ctr"/>
+          <a:bodyPr wrap="square" lIns="381" tIns="2540" rIns="2540" bIns="381" rtlCol="0" anchor="ctr">
+            <a:noAutofit/>
+          </a:bodyPr>
           <a:lstStyle/>
           <a:p>
             <a:pPr marL="0" indent="0">
               <a:buNone/>
             </a:pPr>
             <a:r>
-              <a:rPr lang="en-US" sz="1400" b="1" dirty="0">
+              <a:rPr lang="en-US" sz="1500" b="1" dirty="0">
                 <a:solidFill>
                   <a:schemeClr val="bg1"/>
                 </a:solidFill>
@@ -11682,7 +11746,7 @@
               <a:t>Customer: </a:t>
             </a:r>
             <a:r>
-              <a:rPr lang="en-US" sz="1400" dirty="0">
+              <a:rPr lang="en-US" sz="1500" dirty="0">
                 <a:solidFill>
                   <a:schemeClr val="bg1"/>
                 </a:solidFill>
@@ -11704,8 +11768,8 @@
         </p:nvSpPr>
         <p:spPr>
           <a:xfrm>
-            <a:off x="5029200" y="4645152"/>
-            <a:ext cx="5760720" cy="640080"/>
+            <a:off x="5029200" y="4744638"/>
+            <a:ext cx="5760720" cy="612648"/>
           </a:xfrm>
           <a:prstGeom prst="roundRect">
             <a:avLst>
@@ -11722,14 +11786,16 @@
           </a:ln>
         </p:spPr>
         <p:txBody>
-          <a:bodyPr wrap="square" lIns="381" tIns="2540" rIns="2540" bIns="381" rtlCol="0" anchor="ctr"/>
+          <a:bodyPr wrap="square" lIns="381" tIns="2540" rIns="2540" bIns="381" rtlCol="0" anchor="ctr">
+            <a:noAutofit/>
+          </a:bodyPr>
           <a:lstStyle/>
           <a:p>
             <a:pPr marL="0" indent="0">
               <a:buNone/>
             </a:pPr>
             <a:r>
-              <a:rPr lang="en-US" sz="1400" b="1" dirty="0">
+              <a:rPr lang="en-US" sz="1500" b="1" dirty="0">
                 <a:solidFill>
                   <a:schemeClr val="tx1"/>
                 </a:solidFill>
@@ -11740,7 +11806,7 @@
               <a:t>Support: </a:t>
             </a:r>
             <a:r>
-              <a:rPr lang="en-US" sz="1400" dirty="0">
+              <a:rPr lang="en-US" sz="1500" dirty="0">
                 <a:solidFill>
                   <a:schemeClr val="tx1"/>
                 </a:solidFill>
@@ -11762,8 +11828,8 @@
         </p:nvSpPr>
         <p:spPr>
           <a:xfrm>
-            <a:off x="5852160" y="5404104"/>
-            <a:ext cx="5760720" cy="640080"/>
+            <a:off x="5852160" y="5406481"/>
+            <a:ext cx="5760720" cy="777240"/>
           </a:xfrm>
           <a:prstGeom prst="roundRect">
             <a:avLst>
@@ -11780,14 +11846,16 @@
           </a:ln>
         </p:spPr>
         <p:txBody>
-          <a:bodyPr wrap="square" lIns="381" tIns="2540" rIns="2540" bIns="381" rtlCol="0" anchor="ctr"/>
+          <a:bodyPr wrap="square" lIns="381" tIns="2540" rIns="2540" bIns="381" rtlCol="0" anchor="ctr">
+            <a:noAutofit/>
+          </a:bodyPr>
           <a:lstStyle/>
           <a:p>
             <a:pPr marL="0" indent="0">
               <a:buNone/>
             </a:pPr>
             <a:r>
-              <a:rPr lang="en-US" sz="1400" b="1" dirty="0">
+              <a:rPr lang="en-US" sz="1500" b="1" dirty="0">
                 <a:solidFill>
                   <a:schemeClr val="bg1"/>
                 </a:solidFill>
@@ -11798,7 +11866,7 @@
               <a:t>Customer: </a:t>
             </a:r>
             <a:r>
-              <a:rPr lang="en-US" sz="1400" dirty="0">
+              <a:rPr lang="en-US" sz="1500" dirty="0">
                 <a:solidFill>
                   <a:schemeClr val="bg1"/>
                 </a:solidFill>

--- a/docs/Phase 1 PPT.pptx
+++ b/docs/Phase 1 PPT.pptx
@@ -957,7 +957,7 @@
           <a:p>
             <a:r>
               <a:rPr lang="en-US" dirty="0"/>
-              <a:t>Explain the redundancy versus coverage choice: 20 conversations labeled by all six, 10 by pairs, 5 by triples, and 65 unique per batch. Annotators run Potato locally and send back annotation_output.</a:t>
+              <a:t>Explain the redundancy versus coverage choice: 30 conversations labeled by all six (6 labels each, for agreement and a majority vote) and 70 unique per annotator per batch. 450 distinct conversations per round. Annotators run Potato locally and send back annotation_output.</a:t>
             </a:r>
           </a:p>
         </p:txBody>
@@ -1161,7 +1161,7 @@
           <a:p>
             <a:r>
               <a:rPr lang="en-US" dirty="0"/>
-              <a:t>And it is not easy: “Thanks a lot” after a useless reply is sarcasm, not praise. That is why you read the whole conversation.</a:t>
+              <a:t>And it is not easy: “Thanks a lot” after a useless reply is sarcasm, not praise. That is why earlier messages matter when the last one is unclear.</a:t>
             </a:r>
           </a:p>
           <a:p>
@@ -1254,7 +1254,7 @@
           <a:p>
             <a:r>
               <a:rPr lang="en-US" dirty="0"/>
-              <a:t>Five labels from calm and positive to angry and demanding. The label is the customer's overall tone across the whole conversation; the last message does not take priority. If tones mix, use the order shown on the slide. Next five slides: one real example per label.</a:t>
+              <a:t>Five labels from calm and positive to angry and demanding. The label is the tone of the customer’s last message. Read earlier turns only when it is unclear, e.g. a bare “thanks” that might be sarcastic, or a one-word reply. If the last message mixes tones, use the order shown on the slide. Next five slides: one real example per label.</a:t>
             </a:r>
           </a:p>
         </p:txBody>
@@ -1341,7 +1341,7 @@
           <a:p>
             <a:r>
               <a:rPr lang="en-US" dirty="0"/>
-              <a:t>Click once to show the whole conversation, then once more to show the guide panel. 1. Appreciative or positive: The customer expresses enthusiasm in both messages, praising the movie and saying “Awesome thanks”. They ask for nothing, so the exchange supports an Appreciative label.</a:t>
+              <a:t>Click once to show the whole conversation, then once more to show the guide panel. 1. Appreciative or positive: The last message, “Awesome thanks”, is genuine enthusiasm. The earlier praise for the movie confirms it is not sarcasm.</a:t>
             </a:r>
           </a:p>
         </p:txBody>
@@ -3117,7 +3117,7 @@
                 <a:ea typeface="Calibri" pitchFamily="34" charset="-122"/>
                 <a:cs typeface="Calibri" pitchFamily="34" charset="-120"/>
               </a:rPr>
-              <a:t>Read the whole conversation first; agent replies are context.</a:t>
+              <a:t>Start with the customer’s last message; earlier turns are context.</a:t>
             </a:r>
             <a:endParaRPr lang="en-US" sz="1500" dirty="0"/>
           </a:p>
@@ -3337,7 +3337,7 @@
                 <a:ea typeface="Calibri" pitchFamily="34" charset="-122"/>
                 <a:cs typeface="Calibri" pitchFamily="34" charset="-120"/>
               </a:rPr>
-              <a:t>Label the customer's tone across the whole conversation.</a:t>
+              <a:t>If the last message is unclear, use the earlier conversation to decide.</a:t>
             </a:r>
             <a:endParaRPr lang="en-US" sz="1500" dirty="0"/>
           </a:p>
@@ -3447,7 +3447,7 @@
                 <a:ea typeface="Calibri" pitchFamily="34" charset="-122"/>
                 <a:cs typeface="Calibri" pitchFamily="34" charset="-120"/>
               </a:rPr>
-              <a:t>If tones mix, use this order: Escalatory, Frustrated, Help-seeking, Appreciative, Neutral.</a:t>
+              <a:t>If the last message mixes tones, use this order: Escalatory, Frustrated, Help-seeking, Appreciative, Neutral.</a:t>
             </a:r>
             <a:endParaRPr lang="en-US" sz="1500" dirty="0"/>
           </a:p>
@@ -3657,7 +3657,7 @@
         </p:nvGraphicFramePr>
         <p:xfrm>
           <a:off x="6400800" y="2560320"/>
-          <a:ext cx="5212080" cy="2286000"/>
+          <a:ext cx="5212080" cy="1371600"/>
         </p:xfrm>
         <a:graphic>
           <a:graphicData uri="http://schemas.openxmlformats.org/drawingml/2006/table">
@@ -3983,7 +3983,7 @@
                           <a:ea typeface="Calibri" pitchFamily="34" charset="-122"/>
                           <a:cs typeface="Calibri" pitchFamily="34" charset="-120"/>
                         </a:rPr>
-                        <a:t>20</a:t>
+                        <a:t>30</a:t>
                       </a:r>
                       <a:endParaRPr lang="en-US" sz="1400" dirty="0">
                         <a:latin typeface="Calibri" charset="0"/>
@@ -4126,428 +4126,6 @@
                           <a:ea typeface="Calibri" pitchFamily="34" charset="-122"/>
                           <a:cs typeface="Calibri" pitchFamily="34" charset="-120"/>
                         </a:rPr>
-                        <a:t>Pair</a:t>
-                      </a:r>
-                      <a:endParaRPr lang="en-US" sz="1400" dirty="0">
-                        <a:latin typeface="Calibri" charset="0"/>
-                        <a:ea typeface="Calibri" charset="0"/>
-                        <a:cs typeface="Calibri" charset="0"/>
-                      </a:endParaRPr>
-                    </a:p>
-                  </a:txBody>
-                  <a:tcPr marL="109728" marR="109728" marT="0" marB="0" anchor="ctr">
-                    <a:lnL w="12700" cap="flat" cmpd="sng" algn="ctr">
-                      <a:solidFill>
-                        <a:srgbClr val="BBBBBB"/>
-                      </a:solidFill>
-                      <a:prstDash val="solid"/>
-                      <a:round/>
-                      <a:headEnd type="none" w="med" len="med"/>
-                      <a:tailEnd type="none" w="med" len="med"/>
-                    </a:lnL>
-                    <a:lnR w="12700" cap="flat" cmpd="sng" algn="ctr">
-                      <a:solidFill>
-                        <a:srgbClr val="BBBBBB"/>
-                      </a:solidFill>
-                      <a:prstDash val="solid"/>
-                      <a:round/>
-                      <a:headEnd type="none" w="med" len="med"/>
-                      <a:tailEnd type="none" w="med" len="med"/>
-                    </a:lnR>
-                    <a:lnT w="12700" cap="flat" cmpd="sng" algn="ctr">
-                      <a:solidFill>
-                        <a:srgbClr val="BBBBBB"/>
-                      </a:solidFill>
-                      <a:prstDash val="solid"/>
-                      <a:round/>
-                      <a:headEnd type="none" w="med" len="med"/>
-                      <a:tailEnd type="none" w="med" len="med"/>
-                    </a:lnT>
-                    <a:lnB w="12700" cap="flat" cmpd="sng" algn="ctr">
-                      <a:solidFill>
-                        <a:srgbClr val="BBBBBB"/>
-                      </a:solidFill>
-                      <a:prstDash val="solid"/>
-                      <a:round/>
-                      <a:headEnd type="none" w="med" len="med"/>
-                      <a:tailEnd type="none" w="med" len="med"/>
-                    </a:lnB>
-                    <a:solidFill>
-                      <a:srgbClr val="FFFFFF"/>
-                    </a:solidFill>
-                  </a:tcPr>
-                </a:tc>
-                <a:tc>
-                  <a:txBody>
-                    <a:bodyPr/>
-                    <a:lstStyle/>
-                    <a:p>
-                      <a:pPr marL="0" indent="0">
-                        <a:buNone/>
-                      </a:pPr>
-                      <a:r>
-                        <a:rPr lang="en-US" sz="1400" dirty="0">
-                          <a:solidFill>
-                            <a:srgbClr val="000000"/>
-                          </a:solidFill>
-                          <a:latin typeface="Calibri" pitchFamily="34" charset="0"/>
-                          <a:ea typeface="Calibri" pitchFamily="34" charset="-122"/>
-                          <a:cs typeface="Calibri" pitchFamily="34" charset="-120"/>
-                        </a:rPr>
-                        <a:t>10</a:t>
-                      </a:r>
-                      <a:endParaRPr lang="en-US" sz="1400" dirty="0">
-                        <a:latin typeface="Calibri" charset="0"/>
-                        <a:ea typeface="Calibri" charset="0"/>
-                        <a:cs typeface="Calibri" charset="0"/>
-                      </a:endParaRPr>
-                    </a:p>
-                  </a:txBody>
-                  <a:tcPr marL="109728" marR="109728" marT="0" marB="0" anchor="ctr">
-                    <a:lnL w="12700" cap="flat" cmpd="sng" algn="ctr">
-                      <a:solidFill>
-                        <a:srgbClr val="BBBBBB"/>
-                      </a:solidFill>
-                      <a:prstDash val="solid"/>
-                      <a:round/>
-                      <a:headEnd type="none" w="med" len="med"/>
-                      <a:tailEnd type="none" w="med" len="med"/>
-                    </a:lnL>
-                    <a:lnR w="12700" cap="flat" cmpd="sng" algn="ctr">
-                      <a:solidFill>
-                        <a:srgbClr val="BBBBBB"/>
-                      </a:solidFill>
-                      <a:prstDash val="solid"/>
-                      <a:round/>
-                      <a:headEnd type="none" w="med" len="med"/>
-                      <a:tailEnd type="none" w="med" len="med"/>
-                    </a:lnR>
-                    <a:lnT w="12700" cap="flat" cmpd="sng" algn="ctr">
-                      <a:solidFill>
-                        <a:srgbClr val="BBBBBB"/>
-                      </a:solidFill>
-                      <a:prstDash val="solid"/>
-                      <a:round/>
-                      <a:headEnd type="none" w="med" len="med"/>
-                      <a:tailEnd type="none" w="med" len="med"/>
-                    </a:lnT>
-                    <a:lnB w="12700" cap="flat" cmpd="sng" algn="ctr">
-                      <a:solidFill>
-                        <a:srgbClr val="BBBBBB"/>
-                      </a:solidFill>
-                      <a:prstDash val="solid"/>
-                      <a:round/>
-                      <a:headEnd type="none" w="med" len="med"/>
-                      <a:tailEnd type="none" w="med" len="med"/>
-                    </a:lnB>
-                    <a:solidFill>
-                      <a:srgbClr val="FFFFFF"/>
-                    </a:solidFill>
-                  </a:tcPr>
-                </a:tc>
-                <a:tc>
-                  <a:txBody>
-                    <a:bodyPr/>
-                    <a:lstStyle/>
-                    <a:p>
-                      <a:pPr marL="0" indent="0">
-                        <a:buNone/>
-                      </a:pPr>
-                      <a:r>
-                        <a:rPr lang="en-US" sz="1400" dirty="0">
-                          <a:solidFill>
-                            <a:srgbClr val="000000"/>
-                          </a:solidFill>
-                          <a:latin typeface="Calibri" pitchFamily="34" charset="0"/>
-                          <a:ea typeface="Calibri" pitchFamily="34" charset="-122"/>
-                          <a:cs typeface="Calibri" pitchFamily="34" charset="-120"/>
-                        </a:rPr>
-                        <a:t>2 annotators</a:t>
-                      </a:r>
-                      <a:endParaRPr lang="en-US" sz="1400" dirty="0">
-                        <a:latin typeface="Calibri" charset="0"/>
-                        <a:ea typeface="Calibri" charset="0"/>
-                        <a:cs typeface="Calibri" charset="0"/>
-                      </a:endParaRPr>
-                    </a:p>
-                  </a:txBody>
-                  <a:tcPr marL="109728" marR="109728" marT="0" marB="0" anchor="ctr">
-                    <a:lnL w="12700" cap="flat" cmpd="sng" algn="ctr">
-                      <a:solidFill>
-                        <a:srgbClr val="BBBBBB"/>
-                      </a:solidFill>
-                      <a:prstDash val="solid"/>
-                      <a:round/>
-                      <a:headEnd type="none" w="med" len="med"/>
-                      <a:tailEnd type="none" w="med" len="med"/>
-                    </a:lnL>
-                    <a:lnR w="12700" cap="flat" cmpd="sng" algn="ctr">
-                      <a:solidFill>
-                        <a:srgbClr val="BBBBBB"/>
-                      </a:solidFill>
-                      <a:prstDash val="solid"/>
-                      <a:round/>
-                      <a:headEnd type="none" w="med" len="med"/>
-                      <a:tailEnd type="none" w="med" len="med"/>
-                    </a:lnR>
-                    <a:lnT w="12700" cap="flat" cmpd="sng" algn="ctr">
-                      <a:solidFill>
-                        <a:srgbClr val="BBBBBB"/>
-                      </a:solidFill>
-                      <a:prstDash val="solid"/>
-                      <a:round/>
-                      <a:headEnd type="none" w="med" len="med"/>
-                      <a:tailEnd type="none" w="med" len="med"/>
-                    </a:lnT>
-                    <a:lnB w="12700" cap="flat" cmpd="sng" algn="ctr">
-                      <a:solidFill>
-                        <a:srgbClr val="BBBBBB"/>
-                      </a:solidFill>
-                      <a:prstDash val="solid"/>
-                      <a:round/>
-                      <a:headEnd type="none" w="med" len="med"/>
-                      <a:tailEnd type="none" w="med" len="med"/>
-                    </a:lnB>
-                    <a:solidFill>
-                      <a:srgbClr val="FFFFFF"/>
-                    </a:solidFill>
-                  </a:tcPr>
-                </a:tc>
-                <a:extLst>
-                  <a:ext uri="{0D108BD9-81ED-4DB2-BD59-A6C34878D82A}">
-                    <a16:rowId xmlns:a16="http://schemas.microsoft.com/office/drawing/2014/main" val="10002"/>
-                  </a:ext>
-                </a:extLst>
-              </a:tr>
-              <a:tr h="457200">
-                <a:tc>
-                  <a:txBody>
-                    <a:bodyPr/>
-                    <a:lstStyle/>
-                    <a:p>
-                      <a:pPr marL="0" indent="0">
-                        <a:buNone/>
-                      </a:pPr>
-                      <a:r>
-                        <a:rPr lang="en-US" sz="1400" b="1" dirty="0">
-                          <a:solidFill>
-                            <a:srgbClr val="000000"/>
-                          </a:solidFill>
-                          <a:latin typeface="Calibri" pitchFamily="34" charset="0"/>
-                          <a:ea typeface="Calibri" pitchFamily="34" charset="-122"/>
-                          <a:cs typeface="Calibri" pitchFamily="34" charset="-120"/>
-                        </a:rPr>
-                        <a:t>Triple</a:t>
-                      </a:r>
-                      <a:endParaRPr lang="en-US" sz="1400" dirty="0">
-                        <a:latin typeface="Calibri" charset="0"/>
-                        <a:ea typeface="Calibri" charset="0"/>
-                        <a:cs typeface="Calibri" charset="0"/>
-                      </a:endParaRPr>
-                    </a:p>
-                  </a:txBody>
-                  <a:tcPr marL="109728" marR="109728" marT="0" marB="0" anchor="ctr">
-                    <a:lnL w="12700" cap="flat" cmpd="sng" algn="ctr">
-                      <a:solidFill>
-                        <a:srgbClr val="BBBBBB"/>
-                      </a:solidFill>
-                      <a:prstDash val="solid"/>
-                      <a:round/>
-                      <a:headEnd type="none" w="med" len="med"/>
-                      <a:tailEnd type="none" w="med" len="med"/>
-                    </a:lnL>
-                    <a:lnR w="12700" cap="flat" cmpd="sng" algn="ctr">
-                      <a:solidFill>
-                        <a:srgbClr val="BBBBBB"/>
-                      </a:solidFill>
-                      <a:prstDash val="solid"/>
-                      <a:round/>
-                      <a:headEnd type="none" w="med" len="med"/>
-                      <a:tailEnd type="none" w="med" len="med"/>
-                    </a:lnR>
-                    <a:lnT w="12700" cap="flat" cmpd="sng" algn="ctr">
-                      <a:solidFill>
-                        <a:srgbClr val="BBBBBB"/>
-                      </a:solidFill>
-                      <a:prstDash val="solid"/>
-                      <a:round/>
-                      <a:headEnd type="none" w="med" len="med"/>
-                      <a:tailEnd type="none" w="med" len="med"/>
-                    </a:lnT>
-                    <a:lnB w="12700" cap="flat" cmpd="sng" algn="ctr">
-                      <a:solidFill>
-                        <a:srgbClr val="BBBBBB"/>
-                      </a:solidFill>
-                      <a:prstDash val="solid"/>
-                      <a:round/>
-                      <a:headEnd type="none" w="med" len="med"/>
-                      <a:tailEnd type="none" w="med" len="med"/>
-                    </a:lnB>
-                    <a:solidFill>
-                      <a:srgbClr val="FFFFFF"/>
-                    </a:solidFill>
-                  </a:tcPr>
-                </a:tc>
-                <a:tc>
-                  <a:txBody>
-                    <a:bodyPr/>
-                    <a:lstStyle/>
-                    <a:p>
-                      <a:pPr marL="0" indent="0">
-                        <a:buNone/>
-                      </a:pPr>
-                      <a:r>
-                        <a:rPr lang="en-US" sz="1400" dirty="0">
-                          <a:solidFill>
-                            <a:srgbClr val="000000"/>
-                          </a:solidFill>
-                          <a:latin typeface="Calibri" pitchFamily="34" charset="0"/>
-                          <a:ea typeface="Calibri" pitchFamily="34" charset="-122"/>
-                          <a:cs typeface="Calibri" pitchFamily="34" charset="-120"/>
-                        </a:rPr>
-                        <a:t>5</a:t>
-                      </a:r>
-                      <a:endParaRPr lang="en-US" sz="1400" dirty="0">
-                        <a:latin typeface="Calibri" charset="0"/>
-                        <a:ea typeface="Calibri" charset="0"/>
-                        <a:cs typeface="Calibri" charset="0"/>
-                      </a:endParaRPr>
-                    </a:p>
-                  </a:txBody>
-                  <a:tcPr marL="109728" marR="109728" marT="0" marB="0" anchor="ctr">
-                    <a:lnL w="12700" cap="flat" cmpd="sng" algn="ctr">
-                      <a:solidFill>
-                        <a:srgbClr val="BBBBBB"/>
-                      </a:solidFill>
-                      <a:prstDash val="solid"/>
-                      <a:round/>
-                      <a:headEnd type="none" w="med" len="med"/>
-                      <a:tailEnd type="none" w="med" len="med"/>
-                    </a:lnL>
-                    <a:lnR w="12700" cap="flat" cmpd="sng" algn="ctr">
-                      <a:solidFill>
-                        <a:srgbClr val="BBBBBB"/>
-                      </a:solidFill>
-                      <a:prstDash val="solid"/>
-                      <a:round/>
-                      <a:headEnd type="none" w="med" len="med"/>
-                      <a:tailEnd type="none" w="med" len="med"/>
-                    </a:lnR>
-                    <a:lnT w="12700" cap="flat" cmpd="sng" algn="ctr">
-                      <a:solidFill>
-                        <a:srgbClr val="BBBBBB"/>
-                      </a:solidFill>
-                      <a:prstDash val="solid"/>
-                      <a:round/>
-                      <a:headEnd type="none" w="med" len="med"/>
-                      <a:tailEnd type="none" w="med" len="med"/>
-                    </a:lnT>
-                    <a:lnB w="12700" cap="flat" cmpd="sng" algn="ctr">
-                      <a:solidFill>
-                        <a:srgbClr val="BBBBBB"/>
-                      </a:solidFill>
-                      <a:prstDash val="solid"/>
-                      <a:round/>
-                      <a:headEnd type="none" w="med" len="med"/>
-                      <a:tailEnd type="none" w="med" len="med"/>
-                    </a:lnB>
-                    <a:solidFill>
-                      <a:srgbClr val="FFFFFF"/>
-                    </a:solidFill>
-                  </a:tcPr>
-                </a:tc>
-                <a:tc>
-                  <a:txBody>
-                    <a:bodyPr/>
-                    <a:lstStyle/>
-                    <a:p>
-                      <a:pPr marL="0" indent="0">
-                        <a:buNone/>
-                      </a:pPr>
-                      <a:r>
-                        <a:rPr lang="en-US" sz="1400" dirty="0">
-                          <a:solidFill>
-                            <a:srgbClr val="000000"/>
-                          </a:solidFill>
-                          <a:latin typeface="Calibri" pitchFamily="34" charset="0"/>
-                          <a:ea typeface="Calibri" pitchFamily="34" charset="-122"/>
-                          <a:cs typeface="Calibri" pitchFamily="34" charset="-120"/>
-                        </a:rPr>
-                        <a:t>3 annotators</a:t>
-                      </a:r>
-                      <a:endParaRPr lang="en-US" sz="1400" dirty="0">
-                        <a:latin typeface="Calibri" charset="0"/>
-                        <a:ea typeface="Calibri" charset="0"/>
-                        <a:cs typeface="Calibri" charset="0"/>
-                      </a:endParaRPr>
-                    </a:p>
-                  </a:txBody>
-                  <a:tcPr marL="109728" marR="109728" marT="0" marB="0" anchor="ctr">
-                    <a:lnL w="12700" cap="flat" cmpd="sng" algn="ctr">
-                      <a:solidFill>
-                        <a:srgbClr val="BBBBBB"/>
-                      </a:solidFill>
-                      <a:prstDash val="solid"/>
-                      <a:round/>
-                      <a:headEnd type="none" w="med" len="med"/>
-                      <a:tailEnd type="none" w="med" len="med"/>
-                    </a:lnL>
-                    <a:lnR w="12700" cap="flat" cmpd="sng" algn="ctr">
-                      <a:solidFill>
-                        <a:srgbClr val="BBBBBB"/>
-                      </a:solidFill>
-                      <a:prstDash val="solid"/>
-                      <a:round/>
-                      <a:headEnd type="none" w="med" len="med"/>
-                      <a:tailEnd type="none" w="med" len="med"/>
-                    </a:lnR>
-                    <a:lnT w="12700" cap="flat" cmpd="sng" algn="ctr">
-                      <a:solidFill>
-                        <a:srgbClr val="BBBBBB"/>
-                      </a:solidFill>
-                      <a:prstDash val="solid"/>
-                      <a:round/>
-                      <a:headEnd type="none" w="med" len="med"/>
-                      <a:tailEnd type="none" w="med" len="med"/>
-                    </a:lnT>
-                    <a:lnB w="12700" cap="flat" cmpd="sng" algn="ctr">
-                      <a:solidFill>
-                        <a:srgbClr val="BBBBBB"/>
-                      </a:solidFill>
-                      <a:prstDash val="solid"/>
-                      <a:round/>
-                      <a:headEnd type="none" w="med" len="med"/>
-                      <a:tailEnd type="none" w="med" len="med"/>
-                    </a:lnB>
-                    <a:solidFill>
-                      <a:srgbClr val="FFFFFF"/>
-                    </a:solidFill>
-                  </a:tcPr>
-                </a:tc>
-                <a:extLst>
-                  <a:ext uri="{0D108BD9-81ED-4DB2-BD59-A6C34878D82A}">
-                    <a16:rowId xmlns:a16="http://schemas.microsoft.com/office/drawing/2014/main" val="10003"/>
-                  </a:ext>
-                </a:extLst>
-              </a:tr>
-              <a:tr h="457200">
-                <a:tc>
-                  <a:txBody>
-                    <a:bodyPr/>
-                    <a:lstStyle/>
-                    <a:p>
-                      <a:pPr marL="0" indent="0">
-                        <a:buNone/>
-                      </a:pPr>
-                      <a:r>
-                        <a:rPr lang="en-US" sz="1400" b="1" dirty="0">
-                          <a:solidFill>
-                            <a:srgbClr val="000000"/>
-                          </a:solidFill>
-                          <a:latin typeface="Calibri" pitchFamily="34" charset="0"/>
-                          <a:ea typeface="Calibri" pitchFamily="34" charset="-122"/>
-                          <a:cs typeface="Calibri" pitchFamily="34" charset="-120"/>
-                        </a:rPr>
                         <a:t>Unique</a:t>
                       </a:r>
                       <a:endParaRPr lang="en-US" sz="1400" dirty="0">
@@ -4616,7 +4194,7 @@
                           <a:ea typeface="Calibri" pitchFamily="34" charset="-122"/>
                           <a:cs typeface="Calibri" pitchFamily="34" charset="-120"/>
                         </a:rPr>
-                        <a:t>65</a:t>
+                        <a:t>70</a:t>
                       </a:r>
                       <a:endParaRPr lang="en-US" sz="1400" dirty="0">
                         <a:latin typeface="Calibri" charset="0"/>
@@ -4753,8 +4331,8 @@
         </p:nvSpPr>
         <p:spPr>
           <a:xfrm>
-            <a:off x="6400800" y="5029200"/>
-            <a:ext cx="5212080" cy="1005840"/>
+            <a:off x="6400800" y="4114800"/>
+            <a:ext cx="5212080" cy="1828800"/>
           </a:xfrm>
           <a:prstGeom prst="rect">
             <a:avLst/>
@@ -4767,6 +4345,9 @@
           <a:lstStyle/>
           <a:p>
             <a:pPr marL="0" indent="0">
+              <a:spcAft>
+                <a:spcPts val="400"/>
+              </a:spcAft>
               <a:buNone/>
             </a:pPr>
             <a:r>
@@ -4778,8 +4359,47 @@
                 <a:ea typeface="Calibri" pitchFamily="34" charset="-122"/>
                 <a:cs typeface="Calibri" pitchFamily="34" charset="-120"/>
               </a:rPr>
-              <a:t>Per annotator, per batch: 20 + 10 + 5 + 65 = 100 items.
-Distinct conversations: 20 + 30 + 10 + 390 = 450 per round. Up to 900 across both rounds.</a:t>
+              <a:t>Per annotator, per batch: 30 + 70 = 100 items.</a:t>
+            </a:r>
+            <a:endParaRPr lang="en-US" sz="1500" dirty="0"/>
+          </a:p>
+          <a:p>
+            <a:pPr marL="0" indent="0">
+              <a:spcAft>
+                <a:spcPts val="400"/>
+              </a:spcAft>
+              <a:buNone/>
+            </a:pPr>
+            <a:r>
+              <a:rPr lang="en-US" sz="1500" dirty="0">
+                <a:solidFill>
+                  <a:schemeClr val="tx2"/>
+                </a:solidFill>
+                <a:latin typeface="Calibri" pitchFamily="34" charset="0"/>
+                <a:ea typeface="Calibri" pitchFamily="34" charset="-122"/>
+                <a:cs typeface="Calibri" pitchFamily="34" charset="-120"/>
+              </a:rPr>
+              <a:t>Distinct conversations: 30 + 420 = 450 per round. Up to 900 across both rounds.</a:t>
+            </a:r>
+            <a:endParaRPr lang="en-US" sz="1500" dirty="0"/>
+          </a:p>
+          <a:p>
+            <a:pPr marL="0" indent="0">
+              <a:spcAft>
+                <a:spcPts val="400"/>
+              </a:spcAft>
+              <a:buNone/>
+            </a:pPr>
+            <a:r>
+              <a:rPr lang="en-US" sz="1500" dirty="0">
+                <a:solidFill>
+                  <a:schemeClr val="tx2"/>
+                </a:solidFill>
+                <a:latin typeface="Calibri" pitchFamily="34" charset="0"/>
+                <a:ea typeface="Calibri" pitchFamily="34" charset="-122"/>
+                <a:cs typeface="Calibri" pitchFamily="34" charset="-120"/>
+              </a:rPr>
+              <a:t>Each shared item gets 6 labels, for agreement and a majority vote.</a:t>
             </a:r>
             <a:endParaRPr lang="en-US" sz="1500" dirty="0"/>
           </a:p>
@@ -5828,7 +5448,7 @@
                 <a:ea typeface="Calibri" pitchFamily="34" charset="-122"/>
                 <a:cs typeface="Calibri" pitchFamily="34" charset="-120"/>
               </a:rPr>
-              <a:t>2.8M support tweets, zero tone labels. “Thanks a lot” can be praise or sarcasm, so you need the whole conversation.</a:t>
+              <a:t>2.8M support tweets, zero tone labels. “Thanks a lot” can be praise or sarcasm, and sometimes only earlier messages tell you which.</a:t>
             </a:r>
             <a:endParaRPr lang="en-US" sz="1400" dirty="0"/>
           </a:p>
@@ -5980,7 +5600,7 @@
                 <a:ea typeface="Calibri" pitchFamily="34" charset="-122"/>
                 <a:cs typeface="Calibri" pitchFamily="34" charset="-120"/>
               </a:rPr>
-              <a:t>Classify the customer's overall tone across the complete conversation. Agent replies provide context; the last message alone may be misleading.</a:t>
+              <a:t>Label the tone of the customer’s last message. If it is unclear on its own, use the earlier conversation as context.</a:t>
             </a:r>
             <a:endParaRPr lang="en-US" sz="2000" dirty="0"/>
           </a:p>
@@ -6924,7 +6544,7 @@
                 <a:ea typeface="Calibri" pitchFamily="34" charset="-122"/>
                 <a:cs typeface="Calibri" pitchFamily="34" charset="-120"/>
               </a:rPr>
-              <a:t>When multiple tones apply across the exchange: Escalatory, Frustrated, Help-seeking, Appreciative, Neutral.</a:t>
+              <a:t>If the last message shows more than one tone: Escalatory, Frustrated, Help-seeking, Appreciative, Neutral.</a:t>
             </a:r>
             <a:endParaRPr lang="en-US" sz="1800" dirty="0"/>
           </a:p>
@@ -7466,7 +7086,7 @@
                 <a:ea typeface="Calibri" pitchFamily="34" charset="-122"/>
                 <a:cs typeface="Calibri" pitchFamily="34" charset="-120"/>
               </a:rPr>
-              <a:t>The customer expresses enthusiasm in both messages, praising the movie and saying “Awesome thanks”. The exchange supports an Appreciative label.</a:t>
+              <a:t>The last message, “Awesome thanks”, is genuine enthusiasm. The earlier praise for the movie confirms it is not sarcasm.</a:t>
             </a:r>
             <a:endParaRPr lang="en-US" sz="1600" dirty="0"/>
           </a:p>
